--- a/test/read/fixtures/table-styles.pptx
+++ b/test/read/fixtures/table-styles.pptx
@@ -104,11 +104,6 @@
       </a:defRPr>
     </a:lvl9pPr>
   </p:defaultTextStyle>
-  <p:extLst>
-    <p:ext uri="{EFAFB233-063F-42B5-8137-9DF3F51BA10A}">
-      <p15:sldGuideLst xmlns:p15="http://schemas.microsoft.com/office/powerpoint/2012/main"/>
-    </p:ext>
-  </p:extLst>
 </p:presentation>
 </file>
 
@@ -134,7 +129,7 @@
           <p:cNvPr id="2" name="Title 1">
             <a:extLst>
               <a:ext uri="{FF2B5EF4-FFF2-40B4-BE49-F238E27FC236}">
-                <a16:creationId xmlns:a16="http://schemas.microsoft.com/office/drawing/2014/main" id="{6CACBB7E-21C5-57EF-37FE-3AC585483586}"/>
+                <a16:creationId xmlns:a16="http://schemas.microsoft.com/office/drawing/2014/main" id="{16CE0E3B-4A80-9536-3305-8E3E6FD20D9F}"/>
               </a:ext>
             </a:extLst>
           </p:cNvPr>
@@ -171,7 +166,7 @@
           <p:cNvPr id="3" name="Subtitle 2">
             <a:extLst>
               <a:ext uri="{FF2B5EF4-FFF2-40B4-BE49-F238E27FC236}">
-                <a16:creationId xmlns:a16="http://schemas.microsoft.com/office/drawing/2014/main" id="{C4240A64-0C3C-BEE5-3B27-98B11A3FF9F9}"/>
+                <a16:creationId xmlns:a16="http://schemas.microsoft.com/office/drawing/2014/main" id="{362A32C1-FFC6-2856-CF1F-377DBD0C90DB}"/>
               </a:ext>
             </a:extLst>
           </p:cNvPr>
@@ -241,7 +236,7 @@
           <p:cNvPr id="4" name="Date Placeholder 3">
             <a:extLst>
               <a:ext uri="{FF2B5EF4-FFF2-40B4-BE49-F238E27FC236}">
-                <a16:creationId xmlns:a16="http://schemas.microsoft.com/office/drawing/2014/main" id="{24A6F9B6-1D62-CDD3-BDBE-0A9690DE5ECF}"/>
+                <a16:creationId xmlns:a16="http://schemas.microsoft.com/office/drawing/2014/main" id="{D09B3A78-59D1-1643-DC6E-CB7AE18B5848}"/>
               </a:ext>
             </a:extLst>
           </p:cNvPr>
@@ -257,9 +252,9 @@
           <a:bodyPr/>
           <a:lstStyle/>
           <a:p>
-            <a:fld id="{913D9D49-D84E-464F-9AB5-825548F45795}" type="datetimeFigureOut">
+            <a:fld id="{75BF6833-93C2-4A38-B7D5-C0F23136646C}" type="datetimeFigureOut">
               <a:rPr lang="en-US" smtClean="0"/>
-              <a:t>7/15/2026</a:t>
+              <a:t>9/18/2026</a:t>
             </a:fld>
             <a:endParaRPr lang="en-US"/>
           </a:p>
@@ -270,7 +265,7 @@
           <p:cNvPr id="5" name="Footer Placeholder 4">
             <a:extLst>
               <a:ext uri="{FF2B5EF4-FFF2-40B4-BE49-F238E27FC236}">
-                <a16:creationId xmlns:a16="http://schemas.microsoft.com/office/drawing/2014/main" id="{1B1BCF17-C2BB-92E5-1C01-F4B4C691D13D}"/>
+                <a16:creationId xmlns:a16="http://schemas.microsoft.com/office/drawing/2014/main" id="{9170DDCC-9937-8338-703E-2889EB109366}"/>
               </a:ext>
             </a:extLst>
           </p:cNvPr>
@@ -295,7 +290,7 @@
           <p:cNvPr id="6" name="Slide Number Placeholder 5">
             <a:extLst>
               <a:ext uri="{FF2B5EF4-FFF2-40B4-BE49-F238E27FC236}">
-                <a16:creationId xmlns:a16="http://schemas.microsoft.com/office/drawing/2014/main" id="{2E2F4B88-36C3-C55B-8734-BF55BC53EA0F}"/>
+                <a16:creationId xmlns:a16="http://schemas.microsoft.com/office/drawing/2014/main" id="{ADBC4F89-0B90-46AE-B706-6FE33E333646}"/>
               </a:ext>
             </a:extLst>
           </p:cNvPr>
@@ -311,7 +306,7 @@
           <a:bodyPr/>
           <a:lstStyle/>
           <a:p>
-            <a:fld id="{747D0EAC-CB22-4BB9-BA5A-1A28F4942F91}" type="slidenum">
+            <a:fld id="{536A6638-9696-461F-B0E3-CEDCEACB836C}" type="slidenum">
               <a:rPr lang="en-US" smtClean="0"/>
               <a:t>‹#›</a:t>
             </a:fld>
@@ -322,7 +317,7 @@
     </p:spTree>
     <p:extLst>
       <p:ext uri="{BB962C8B-B14F-4D97-AF65-F5344CB8AC3E}">
-        <p14:creationId xmlns:p14="http://schemas.microsoft.com/office/powerpoint/2010/main" val="3476941254"/>
+        <p14:creationId xmlns:p14="http://schemas.microsoft.com/office/powerpoint/2010/main" val="2676455003"/>
       </p:ext>
     </p:extLst>
   </p:cSld>
@@ -354,7 +349,7 @@
           <p:cNvPr id="2" name="Title 1">
             <a:extLst>
               <a:ext uri="{FF2B5EF4-FFF2-40B4-BE49-F238E27FC236}">
-                <a16:creationId xmlns:a16="http://schemas.microsoft.com/office/drawing/2014/main" id="{EF1ED27C-2261-F276-772E-0B1FCAAA2C39}"/>
+                <a16:creationId xmlns:a16="http://schemas.microsoft.com/office/drawing/2014/main" id="{8FBCF2CB-D85E-EBB5-3C35-A1F5CABEB53B}"/>
               </a:ext>
             </a:extLst>
           </p:cNvPr>
@@ -382,7 +377,7 @@
           <p:cNvPr id="3" name="Vertical Text Placeholder 2">
             <a:extLst>
               <a:ext uri="{FF2B5EF4-FFF2-40B4-BE49-F238E27FC236}">
-                <a16:creationId xmlns:a16="http://schemas.microsoft.com/office/drawing/2014/main" id="{02E486AD-FE77-2431-06C9-C1B2D767A933}"/>
+                <a16:creationId xmlns:a16="http://schemas.microsoft.com/office/drawing/2014/main" id="{DCFD3C30-05F9-8E26-F0FD-56555168CA73}"/>
               </a:ext>
             </a:extLst>
           </p:cNvPr>
@@ -439,7 +434,7 @@
           <p:cNvPr id="4" name="Date Placeholder 3">
             <a:extLst>
               <a:ext uri="{FF2B5EF4-FFF2-40B4-BE49-F238E27FC236}">
-                <a16:creationId xmlns:a16="http://schemas.microsoft.com/office/drawing/2014/main" id="{A624921D-2CFC-EEC5-3762-BD6CC21014AF}"/>
+                <a16:creationId xmlns:a16="http://schemas.microsoft.com/office/drawing/2014/main" id="{8AA55307-03F3-148F-10A2-5592ED2428EA}"/>
               </a:ext>
             </a:extLst>
           </p:cNvPr>
@@ -455,9 +450,9 @@
           <a:bodyPr/>
           <a:lstStyle/>
           <a:p>
-            <a:fld id="{913D9D49-D84E-464F-9AB5-825548F45795}" type="datetimeFigureOut">
+            <a:fld id="{75BF6833-93C2-4A38-B7D5-C0F23136646C}" type="datetimeFigureOut">
               <a:rPr lang="en-US" smtClean="0"/>
-              <a:t>7/15/2026</a:t>
+              <a:t>9/18/2026</a:t>
             </a:fld>
             <a:endParaRPr lang="en-US"/>
           </a:p>
@@ -468,7 +463,7 @@
           <p:cNvPr id="5" name="Footer Placeholder 4">
             <a:extLst>
               <a:ext uri="{FF2B5EF4-FFF2-40B4-BE49-F238E27FC236}">
-                <a16:creationId xmlns:a16="http://schemas.microsoft.com/office/drawing/2014/main" id="{5EB09447-3DA3-1649-BE26-41C95AE2555D}"/>
+                <a16:creationId xmlns:a16="http://schemas.microsoft.com/office/drawing/2014/main" id="{799ACEA7-939C-3A20-F705-A934E708F129}"/>
               </a:ext>
             </a:extLst>
           </p:cNvPr>
@@ -493,7 +488,7 @@
           <p:cNvPr id="6" name="Slide Number Placeholder 5">
             <a:extLst>
               <a:ext uri="{FF2B5EF4-FFF2-40B4-BE49-F238E27FC236}">
-                <a16:creationId xmlns:a16="http://schemas.microsoft.com/office/drawing/2014/main" id="{C83FD647-FED1-32C6-BA6A-2D975081F028}"/>
+                <a16:creationId xmlns:a16="http://schemas.microsoft.com/office/drawing/2014/main" id="{A57C5F4F-B226-D14B-1B82-8AA6A43DD245}"/>
               </a:ext>
             </a:extLst>
           </p:cNvPr>
@@ -509,7 +504,7 @@
           <a:bodyPr/>
           <a:lstStyle/>
           <a:p>
-            <a:fld id="{747D0EAC-CB22-4BB9-BA5A-1A28F4942F91}" type="slidenum">
+            <a:fld id="{536A6638-9696-461F-B0E3-CEDCEACB836C}" type="slidenum">
               <a:rPr lang="en-US" smtClean="0"/>
               <a:t>‹#›</a:t>
             </a:fld>
@@ -520,7 +515,7 @@
     </p:spTree>
     <p:extLst>
       <p:ext uri="{BB962C8B-B14F-4D97-AF65-F5344CB8AC3E}">
-        <p14:creationId xmlns:p14="http://schemas.microsoft.com/office/powerpoint/2010/main" val="3652795147"/>
+        <p14:creationId xmlns:p14="http://schemas.microsoft.com/office/powerpoint/2010/main" val="2354148196"/>
       </p:ext>
     </p:extLst>
   </p:cSld>
@@ -552,7 +547,7 @@
           <p:cNvPr id="2" name="Vertical Title 1">
             <a:extLst>
               <a:ext uri="{FF2B5EF4-FFF2-40B4-BE49-F238E27FC236}">
-                <a16:creationId xmlns:a16="http://schemas.microsoft.com/office/drawing/2014/main" id="{55D82A72-A96D-9698-2ED7-9E514F68DFD4}"/>
+                <a16:creationId xmlns:a16="http://schemas.microsoft.com/office/drawing/2014/main" id="{CDD27822-6D59-AF14-7CA9-397DB4CB18C9}"/>
               </a:ext>
             </a:extLst>
           </p:cNvPr>
@@ -585,7 +580,7 @@
           <p:cNvPr id="3" name="Vertical Text Placeholder 2">
             <a:extLst>
               <a:ext uri="{FF2B5EF4-FFF2-40B4-BE49-F238E27FC236}">
-                <a16:creationId xmlns:a16="http://schemas.microsoft.com/office/drawing/2014/main" id="{B9835CCC-DE11-E640-C630-5186D65113AD}"/>
+                <a16:creationId xmlns:a16="http://schemas.microsoft.com/office/drawing/2014/main" id="{A2CA183F-8144-AE9D-93B8-04C0F04F4020}"/>
               </a:ext>
             </a:extLst>
           </p:cNvPr>
@@ -647,7 +642,7 @@
           <p:cNvPr id="4" name="Date Placeholder 3">
             <a:extLst>
               <a:ext uri="{FF2B5EF4-FFF2-40B4-BE49-F238E27FC236}">
-                <a16:creationId xmlns:a16="http://schemas.microsoft.com/office/drawing/2014/main" id="{C6AAA07D-CB04-98E9-D9D1-135F43DDD26C}"/>
+                <a16:creationId xmlns:a16="http://schemas.microsoft.com/office/drawing/2014/main" id="{FAB9AF05-CAB3-864F-6091-370604C73D56}"/>
               </a:ext>
             </a:extLst>
           </p:cNvPr>
@@ -663,9 +658,9 @@
           <a:bodyPr/>
           <a:lstStyle/>
           <a:p>
-            <a:fld id="{913D9D49-D84E-464F-9AB5-825548F45795}" type="datetimeFigureOut">
+            <a:fld id="{75BF6833-93C2-4A38-B7D5-C0F23136646C}" type="datetimeFigureOut">
               <a:rPr lang="en-US" smtClean="0"/>
-              <a:t>7/15/2026</a:t>
+              <a:t>9/18/2026</a:t>
             </a:fld>
             <a:endParaRPr lang="en-US"/>
           </a:p>
@@ -676,7 +671,7 @@
           <p:cNvPr id="5" name="Footer Placeholder 4">
             <a:extLst>
               <a:ext uri="{FF2B5EF4-FFF2-40B4-BE49-F238E27FC236}">
-                <a16:creationId xmlns:a16="http://schemas.microsoft.com/office/drawing/2014/main" id="{DD1C6A70-1466-CAB8-712F-E18853670C9E}"/>
+                <a16:creationId xmlns:a16="http://schemas.microsoft.com/office/drawing/2014/main" id="{1618904E-6BCB-FB98-FF7F-81C129A1850A}"/>
               </a:ext>
             </a:extLst>
           </p:cNvPr>
@@ -701,7 +696,7 @@
           <p:cNvPr id="6" name="Slide Number Placeholder 5">
             <a:extLst>
               <a:ext uri="{FF2B5EF4-FFF2-40B4-BE49-F238E27FC236}">
-                <a16:creationId xmlns:a16="http://schemas.microsoft.com/office/drawing/2014/main" id="{D99F70CC-D8CF-6DB8-758D-ED8E11BD2865}"/>
+                <a16:creationId xmlns:a16="http://schemas.microsoft.com/office/drawing/2014/main" id="{DE5502EB-2A6B-4E6A-CF3A-7A093C1B423D}"/>
               </a:ext>
             </a:extLst>
           </p:cNvPr>
@@ -717,7 +712,7 @@
           <a:bodyPr/>
           <a:lstStyle/>
           <a:p>
-            <a:fld id="{747D0EAC-CB22-4BB9-BA5A-1A28F4942F91}" type="slidenum">
+            <a:fld id="{536A6638-9696-461F-B0E3-CEDCEACB836C}" type="slidenum">
               <a:rPr lang="en-US" smtClean="0"/>
               <a:t>‹#›</a:t>
             </a:fld>
@@ -728,7 +723,7 @@
     </p:spTree>
     <p:extLst>
       <p:ext uri="{BB962C8B-B14F-4D97-AF65-F5344CB8AC3E}">
-        <p14:creationId xmlns:p14="http://schemas.microsoft.com/office/powerpoint/2010/main" val="2012564389"/>
+        <p14:creationId xmlns:p14="http://schemas.microsoft.com/office/powerpoint/2010/main" val="3528667667"/>
       </p:ext>
     </p:extLst>
   </p:cSld>
@@ -760,7 +755,7 @@
           <p:cNvPr id="2" name="Title 1">
             <a:extLst>
               <a:ext uri="{FF2B5EF4-FFF2-40B4-BE49-F238E27FC236}">
-                <a16:creationId xmlns:a16="http://schemas.microsoft.com/office/drawing/2014/main" id="{EAF941DD-4A88-5584-46AD-55C85E3D14AE}"/>
+                <a16:creationId xmlns:a16="http://schemas.microsoft.com/office/drawing/2014/main" id="{3554FED2-F6EB-E819-311C-3F95F27C6DB7}"/>
               </a:ext>
             </a:extLst>
           </p:cNvPr>
@@ -788,7 +783,7 @@
           <p:cNvPr id="3" name="Content Placeholder 2">
             <a:extLst>
               <a:ext uri="{FF2B5EF4-FFF2-40B4-BE49-F238E27FC236}">
-                <a16:creationId xmlns:a16="http://schemas.microsoft.com/office/drawing/2014/main" id="{46851A18-68E8-0DA3-A022-630E7CC1EFCA}"/>
+                <a16:creationId xmlns:a16="http://schemas.microsoft.com/office/drawing/2014/main" id="{44520799-D8DE-36CA-38E6-69ECF1194BDE}"/>
               </a:ext>
             </a:extLst>
           </p:cNvPr>
@@ -845,7 +840,7 @@
           <p:cNvPr id="4" name="Date Placeholder 3">
             <a:extLst>
               <a:ext uri="{FF2B5EF4-FFF2-40B4-BE49-F238E27FC236}">
-                <a16:creationId xmlns:a16="http://schemas.microsoft.com/office/drawing/2014/main" id="{82CE7E20-FB72-CE2C-2E82-5BA4F4FCF9E8}"/>
+                <a16:creationId xmlns:a16="http://schemas.microsoft.com/office/drawing/2014/main" id="{912E17C4-D6F0-8858-901E-D6DD7DBBD7A0}"/>
               </a:ext>
             </a:extLst>
           </p:cNvPr>
@@ -861,9 +856,9 @@
           <a:bodyPr/>
           <a:lstStyle/>
           <a:p>
-            <a:fld id="{913D9D49-D84E-464F-9AB5-825548F45795}" type="datetimeFigureOut">
+            <a:fld id="{75BF6833-93C2-4A38-B7D5-C0F23136646C}" type="datetimeFigureOut">
               <a:rPr lang="en-US" smtClean="0"/>
-              <a:t>7/15/2026</a:t>
+              <a:t>9/18/2026</a:t>
             </a:fld>
             <a:endParaRPr lang="en-US"/>
           </a:p>
@@ -874,7 +869,7 @@
           <p:cNvPr id="5" name="Footer Placeholder 4">
             <a:extLst>
               <a:ext uri="{FF2B5EF4-FFF2-40B4-BE49-F238E27FC236}">
-                <a16:creationId xmlns:a16="http://schemas.microsoft.com/office/drawing/2014/main" id="{96D86B06-C072-1722-951A-5B5ACEC77450}"/>
+                <a16:creationId xmlns:a16="http://schemas.microsoft.com/office/drawing/2014/main" id="{26EBE395-E6F9-E97E-8B98-C0A8A7BD60FF}"/>
               </a:ext>
             </a:extLst>
           </p:cNvPr>
@@ -899,7 +894,7 @@
           <p:cNvPr id="6" name="Slide Number Placeholder 5">
             <a:extLst>
               <a:ext uri="{FF2B5EF4-FFF2-40B4-BE49-F238E27FC236}">
-                <a16:creationId xmlns:a16="http://schemas.microsoft.com/office/drawing/2014/main" id="{97CFB97E-03D5-F2F4-807F-99700D910D03}"/>
+                <a16:creationId xmlns:a16="http://schemas.microsoft.com/office/drawing/2014/main" id="{EB1E84B3-2746-27F4-7148-5EA4D8EFA51D}"/>
               </a:ext>
             </a:extLst>
           </p:cNvPr>
@@ -915,7 +910,7 @@
           <a:bodyPr/>
           <a:lstStyle/>
           <a:p>
-            <a:fld id="{747D0EAC-CB22-4BB9-BA5A-1A28F4942F91}" type="slidenum">
+            <a:fld id="{536A6638-9696-461F-B0E3-CEDCEACB836C}" type="slidenum">
               <a:rPr lang="en-US" smtClean="0"/>
               <a:t>‹#›</a:t>
             </a:fld>
@@ -926,7 +921,7 @@
     </p:spTree>
     <p:extLst>
       <p:ext uri="{BB962C8B-B14F-4D97-AF65-F5344CB8AC3E}">
-        <p14:creationId xmlns:p14="http://schemas.microsoft.com/office/powerpoint/2010/main" val="1034807189"/>
+        <p14:creationId xmlns:p14="http://schemas.microsoft.com/office/powerpoint/2010/main" val="505508387"/>
       </p:ext>
     </p:extLst>
   </p:cSld>
@@ -958,7 +953,7 @@
           <p:cNvPr id="2" name="Title 1">
             <a:extLst>
               <a:ext uri="{FF2B5EF4-FFF2-40B4-BE49-F238E27FC236}">
-                <a16:creationId xmlns:a16="http://schemas.microsoft.com/office/drawing/2014/main" id="{F040C399-F02C-C8E0-CBCC-DC0EFFF8E866}"/>
+                <a16:creationId xmlns:a16="http://schemas.microsoft.com/office/drawing/2014/main" id="{DAC476DF-39E6-16A7-AC8F-8D557B8B546E}"/>
               </a:ext>
             </a:extLst>
           </p:cNvPr>
@@ -995,7 +990,7 @@
           <p:cNvPr id="3" name="Text Placeholder 2">
             <a:extLst>
               <a:ext uri="{FF2B5EF4-FFF2-40B4-BE49-F238E27FC236}">
-                <a16:creationId xmlns:a16="http://schemas.microsoft.com/office/drawing/2014/main" id="{371B3D9B-4A1E-4E3C-B6F9-C9702467BA97}"/>
+                <a16:creationId xmlns:a16="http://schemas.microsoft.com/office/drawing/2014/main" id="{47B9E7A4-DC6E-4331-20A9-26002BD4CBD8}"/>
               </a:ext>
             </a:extLst>
           </p:cNvPr>
@@ -1120,7 +1115,7 @@
           <p:cNvPr id="4" name="Date Placeholder 3">
             <a:extLst>
               <a:ext uri="{FF2B5EF4-FFF2-40B4-BE49-F238E27FC236}">
-                <a16:creationId xmlns:a16="http://schemas.microsoft.com/office/drawing/2014/main" id="{228AB019-DC29-F35F-9901-A1999574FF07}"/>
+                <a16:creationId xmlns:a16="http://schemas.microsoft.com/office/drawing/2014/main" id="{4348C3BF-7A40-43D1-7262-B3C1AA9517EF}"/>
               </a:ext>
             </a:extLst>
           </p:cNvPr>
@@ -1136,9 +1131,9 @@
           <a:bodyPr/>
           <a:lstStyle/>
           <a:p>
-            <a:fld id="{913D9D49-D84E-464F-9AB5-825548F45795}" type="datetimeFigureOut">
+            <a:fld id="{75BF6833-93C2-4A38-B7D5-C0F23136646C}" type="datetimeFigureOut">
               <a:rPr lang="en-US" smtClean="0"/>
-              <a:t>7/15/2026</a:t>
+              <a:t>9/18/2026</a:t>
             </a:fld>
             <a:endParaRPr lang="en-US"/>
           </a:p>
@@ -1149,7 +1144,7 @@
           <p:cNvPr id="5" name="Footer Placeholder 4">
             <a:extLst>
               <a:ext uri="{FF2B5EF4-FFF2-40B4-BE49-F238E27FC236}">
-                <a16:creationId xmlns:a16="http://schemas.microsoft.com/office/drawing/2014/main" id="{51716C93-22AD-0BE0-30E3-E9423A40BFC2}"/>
+                <a16:creationId xmlns:a16="http://schemas.microsoft.com/office/drawing/2014/main" id="{012FCB6B-EC58-8776-1A6B-7AC4C2B7D8E2}"/>
               </a:ext>
             </a:extLst>
           </p:cNvPr>
@@ -1174,7 +1169,7 @@
           <p:cNvPr id="6" name="Slide Number Placeholder 5">
             <a:extLst>
               <a:ext uri="{FF2B5EF4-FFF2-40B4-BE49-F238E27FC236}">
-                <a16:creationId xmlns:a16="http://schemas.microsoft.com/office/drawing/2014/main" id="{7C681239-0362-8BE7-51F2-B0480BFB1119}"/>
+                <a16:creationId xmlns:a16="http://schemas.microsoft.com/office/drawing/2014/main" id="{388618B9-FBD7-D566-79BB-B5409A0C22C5}"/>
               </a:ext>
             </a:extLst>
           </p:cNvPr>
@@ -1190,7 +1185,7 @@
           <a:bodyPr/>
           <a:lstStyle/>
           <a:p>
-            <a:fld id="{747D0EAC-CB22-4BB9-BA5A-1A28F4942F91}" type="slidenum">
+            <a:fld id="{536A6638-9696-461F-B0E3-CEDCEACB836C}" type="slidenum">
               <a:rPr lang="en-US" smtClean="0"/>
               <a:t>‹#›</a:t>
             </a:fld>
@@ -1201,7 +1196,7 @@
     </p:spTree>
     <p:extLst>
       <p:ext uri="{BB962C8B-B14F-4D97-AF65-F5344CB8AC3E}">
-        <p14:creationId xmlns:p14="http://schemas.microsoft.com/office/powerpoint/2010/main" val="2164980540"/>
+        <p14:creationId xmlns:p14="http://schemas.microsoft.com/office/powerpoint/2010/main" val="1835133907"/>
       </p:ext>
     </p:extLst>
   </p:cSld>
@@ -1233,7 +1228,7 @@
           <p:cNvPr id="2" name="Title 1">
             <a:extLst>
               <a:ext uri="{FF2B5EF4-FFF2-40B4-BE49-F238E27FC236}">
-                <a16:creationId xmlns:a16="http://schemas.microsoft.com/office/drawing/2014/main" id="{D1DFA04F-5EE3-096C-6CD5-F6303A427528}"/>
+                <a16:creationId xmlns:a16="http://schemas.microsoft.com/office/drawing/2014/main" id="{FB6FB570-D4FC-038B-2B88-C14E946C3A87}"/>
               </a:ext>
             </a:extLst>
           </p:cNvPr>
@@ -1261,7 +1256,7 @@
           <p:cNvPr id="3" name="Content Placeholder 2">
             <a:extLst>
               <a:ext uri="{FF2B5EF4-FFF2-40B4-BE49-F238E27FC236}">
-                <a16:creationId xmlns:a16="http://schemas.microsoft.com/office/drawing/2014/main" id="{0EE93B1A-65A7-2DC5-F69F-AA04C7126CBD}"/>
+                <a16:creationId xmlns:a16="http://schemas.microsoft.com/office/drawing/2014/main" id="{157D4AEA-3D8C-C3ED-B6FA-F020D865FA2F}"/>
               </a:ext>
             </a:extLst>
           </p:cNvPr>
@@ -1323,7 +1318,7 @@
           <p:cNvPr id="4" name="Content Placeholder 3">
             <a:extLst>
               <a:ext uri="{FF2B5EF4-FFF2-40B4-BE49-F238E27FC236}">
-                <a16:creationId xmlns:a16="http://schemas.microsoft.com/office/drawing/2014/main" id="{0AA73B90-EFC1-6C5E-1820-E8A6220BB5E8}"/>
+                <a16:creationId xmlns:a16="http://schemas.microsoft.com/office/drawing/2014/main" id="{F319C044-CA98-458A-5B77-2E46EBCFE127}"/>
               </a:ext>
             </a:extLst>
           </p:cNvPr>
@@ -1385,7 +1380,7 @@
           <p:cNvPr id="5" name="Date Placeholder 4">
             <a:extLst>
               <a:ext uri="{FF2B5EF4-FFF2-40B4-BE49-F238E27FC236}">
-                <a16:creationId xmlns:a16="http://schemas.microsoft.com/office/drawing/2014/main" id="{A02E9970-DBB1-1842-1821-18CA1D705CF9}"/>
+                <a16:creationId xmlns:a16="http://schemas.microsoft.com/office/drawing/2014/main" id="{8FE535F4-17CB-2C28-C88A-973880932F7E}"/>
               </a:ext>
             </a:extLst>
           </p:cNvPr>
@@ -1401,9 +1396,9 @@
           <a:bodyPr/>
           <a:lstStyle/>
           <a:p>
-            <a:fld id="{913D9D49-D84E-464F-9AB5-825548F45795}" type="datetimeFigureOut">
+            <a:fld id="{75BF6833-93C2-4A38-B7D5-C0F23136646C}" type="datetimeFigureOut">
               <a:rPr lang="en-US" smtClean="0"/>
-              <a:t>7/15/2026</a:t>
+              <a:t>9/18/2026</a:t>
             </a:fld>
             <a:endParaRPr lang="en-US"/>
           </a:p>
@@ -1414,7 +1409,7 @@
           <p:cNvPr id="6" name="Footer Placeholder 5">
             <a:extLst>
               <a:ext uri="{FF2B5EF4-FFF2-40B4-BE49-F238E27FC236}">
-                <a16:creationId xmlns:a16="http://schemas.microsoft.com/office/drawing/2014/main" id="{BBB31062-5083-A921-4049-B733D9BB05FD}"/>
+                <a16:creationId xmlns:a16="http://schemas.microsoft.com/office/drawing/2014/main" id="{787CE3B3-29AE-7DAC-F154-8D8960AC31D4}"/>
               </a:ext>
             </a:extLst>
           </p:cNvPr>
@@ -1439,7 +1434,7 @@
           <p:cNvPr id="7" name="Slide Number Placeholder 6">
             <a:extLst>
               <a:ext uri="{FF2B5EF4-FFF2-40B4-BE49-F238E27FC236}">
-                <a16:creationId xmlns:a16="http://schemas.microsoft.com/office/drawing/2014/main" id="{46AF4853-540D-4F1D-4832-DD6CFF298C82}"/>
+                <a16:creationId xmlns:a16="http://schemas.microsoft.com/office/drawing/2014/main" id="{E83786C1-4A65-A0DD-D111-AB20FB20C1B5}"/>
               </a:ext>
             </a:extLst>
           </p:cNvPr>
@@ -1455,7 +1450,7 @@
           <a:bodyPr/>
           <a:lstStyle/>
           <a:p>
-            <a:fld id="{747D0EAC-CB22-4BB9-BA5A-1A28F4942F91}" type="slidenum">
+            <a:fld id="{536A6638-9696-461F-B0E3-CEDCEACB836C}" type="slidenum">
               <a:rPr lang="en-US" smtClean="0"/>
               <a:t>‹#›</a:t>
             </a:fld>
@@ -1466,7 +1461,7 @@
     </p:spTree>
     <p:extLst>
       <p:ext uri="{BB962C8B-B14F-4D97-AF65-F5344CB8AC3E}">
-        <p14:creationId xmlns:p14="http://schemas.microsoft.com/office/powerpoint/2010/main" val="2513144137"/>
+        <p14:creationId xmlns:p14="http://schemas.microsoft.com/office/powerpoint/2010/main" val="193548542"/>
       </p:ext>
     </p:extLst>
   </p:cSld>
@@ -1498,7 +1493,7 @@
           <p:cNvPr id="2" name="Title 1">
             <a:extLst>
               <a:ext uri="{FF2B5EF4-FFF2-40B4-BE49-F238E27FC236}">
-                <a16:creationId xmlns:a16="http://schemas.microsoft.com/office/drawing/2014/main" id="{7A76E801-0ACC-DF15-5B97-9D1AFFD97F93}"/>
+                <a16:creationId xmlns:a16="http://schemas.microsoft.com/office/drawing/2014/main" id="{7E85F5FE-26A9-B2A9-3016-0A1942904A91}"/>
               </a:ext>
             </a:extLst>
           </p:cNvPr>
@@ -1531,7 +1526,7 @@
           <p:cNvPr id="3" name="Text Placeholder 2">
             <a:extLst>
               <a:ext uri="{FF2B5EF4-FFF2-40B4-BE49-F238E27FC236}">
-                <a16:creationId xmlns:a16="http://schemas.microsoft.com/office/drawing/2014/main" id="{9ABF506E-987E-5B73-FC91-EFDA145BC489}"/>
+                <a16:creationId xmlns:a16="http://schemas.microsoft.com/office/drawing/2014/main" id="{393FEB21-CAF8-DC0A-98CE-849ADF54F663}"/>
               </a:ext>
             </a:extLst>
           </p:cNvPr>
@@ -1602,7 +1597,7 @@
           <p:cNvPr id="4" name="Content Placeholder 3">
             <a:extLst>
               <a:ext uri="{FF2B5EF4-FFF2-40B4-BE49-F238E27FC236}">
-                <a16:creationId xmlns:a16="http://schemas.microsoft.com/office/drawing/2014/main" id="{2CBCE417-B798-C633-E05B-1CD9BF4D188F}"/>
+                <a16:creationId xmlns:a16="http://schemas.microsoft.com/office/drawing/2014/main" id="{AFB4D4B0-3AD8-AF7B-D832-9B19D565038D}"/>
               </a:ext>
             </a:extLst>
           </p:cNvPr>
@@ -1664,7 +1659,7 @@
           <p:cNvPr id="5" name="Text Placeholder 4">
             <a:extLst>
               <a:ext uri="{FF2B5EF4-FFF2-40B4-BE49-F238E27FC236}">
-                <a16:creationId xmlns:a16="http://schemas.microsoft.com/office/drawing/2014/main" id="{FC0C7393-5344-A49E-516A-7C06E7CA6A19}"/>
+                <a16:creationId xmlns:a16="http://schemas.microsoft.com/office/drawing/2014/main" id="{12784CE3-2CAE-9E72-439D-AC56348F93E9}"/>
               </a:ext>
             </a:extLst>
           </p:cNvPr>
@@ -1735,7 +1730,7 @@
           <p:cNvPr id="6" name="Content Placeholder 5">
             <a:extLst>
               <a:ext uri="{FF2B5EF4-FFF2-40B4-BE49-F238E27FC236}">
-                <a16:creationId xmlns:a16="http://schemas.microsoft.com/office/drawing/2014/main" id="{96E4DC42-CA75-245C-DAE9-BA943A4C5E9F}"/>
+                <a16:creationId xmlns:a16="http://schemas.microsoft.com/office/drawing/2014/main" id="{BCFD682D-D24B-7687-9419-C620C7F0EF46}"/>
               </a:ext>
             </a:extLst>
           </p:cNvPr>
@@ -1797,7 +1792,7 @@
           <p:cNvPr id="7" name="Date Placeholder 6">
             <a:extLst>
               <a:ext uri="{FF2B5EF4-FFF2-40B4-BE49-F238E27FC236}">
-                <a16:creationId xmlns:a16="http://schemas.microsoft.com/office/drawing/2014/main" id="{9D88BE42-6674-0EE7-D0DA-01E13A4B93E9}"/>
+                <a16:creationId xmlns:a16="http://schemas.microsoft.com/office/drawing/2014/main" id="{1E1EEBFF-D992-8E97-8AE2-3980037E1980}"/>
               </a:ext>
             </a:extLst>
           </p:cNvPr>
@@ -1813,9 +1808,9 @@
           <a:bodyPr/>
           <a:lstStyle/>
           <a:p>
-            <a:fld id="{913D9D49-D84E-464F-9AB5-825548F45795}" type="datetimeFigureOut">
+            <a:fld id="{75BF6833-93C2-4A38-B7D5-C0F23136646C}" type="datetimeFigureOut">
               <a:rPr lang="en-US" smtClean="0"/>
-              <a:t>7/15/2026</a:t>
+              <a:t>9/18/2026</a:t>
             </a:fld>
             <a:endParaRPr lang="en-US"/>
           </a:p>
@@ -1826,7 +1821,7 @@
           <p:cNvPr id="8" name="Footer Placeholder 7">
             <a:extLst>
               <a:ext uri="{FF2B5EF4-FFF2-40B4-BE49-F238E27FC236}">
-                <a16:creationId xmlns:a16="http://schemas.microsoft.com/office/drawing/2014/main" id="{6BE3A266-3AD7-2E54-3950-4029E493F17B}"/>
+                <a16:creationId xmlns:a16="http://schemas.microsoft.com/office/drawing/2014/main" id="{037027F9-D82E-C65B-16B4-D71E1FAAD837}"/>
               </a:ext>
             </a:extLst>
           </p:cNvPr>
@@ -1851,7 +1846,7 @@
           <p:cNvPr id="9" name="Slide Number Placeholder 8">
             <a:extLst>
               <a:ext uri="{FF2B5EF4-FFF2-40B4-BE49-F238E27FC236}">
-                <a16:creationId xmlns:a16="http://schemas.microsoft.com/office/drawing/2014/main" id="{9D0E6D3A-CC3A-9A8B-BFDE-4C6F626DBABB}"/>
+                <a16:creationId xmlns:a16="http://schemas.microsoft.com/office/drawing/2014/main" id="{84711C3D-4D3C-95F1-A538-86AA33C2ADE7}"/>
               </a:ext>
             </a:extLst>
           </p:cNvPr>
@@ -1867,7 +1862,7 @@
           <a:bodyPr/>
           <a:lstStyle/>
           <a:p>
-            <a:fld id="{747D0EAC-CB22-4BB9-BA5A-1A28F4942F91}" type="slidenum">
+            <a:fld id="{536A6638-9696-461F-B0E3-CEDCEACB836C}" type="slidenum">
               <a:rPr lang="en-US" smtClean="0"/>
               <a:t>‹#›</a:t>
             </a:fld>
@@ -1878,7 +1873,7 @@
     </p:spTree>
     <p:extLst>
       <p:ext uri="{BB962C8B-B14F-4D97-AF65-F5344CB8AC3E}">
-        <p14:creationId xmlns:p14="http://schemas.microsoft.com/office/powerpoint/2010/main" val="483508756"/>
+        <p14:creationId xmlns:p14="http://schemas.microsoft.com/office/powerpoint/2010/main" val="2161041175"/>
       </p:ext>
     </p:extLst>
   </p:cSld>
@@ -1910,7 +1905,7 @@
           <p:cNvPr id="2" name="Title 1">
             <a:extLst>
               <a:ext uri="{FF2B5EF4-FFF2-40B4-BE49-F238E27FC236}">
-                <a16:creationId xmlns:a16="http://schemas.microsoft.com/office/drawing/2014/main" id="{F5709546-55C3-CAC3-2EEB-6085A0482F2D}"/>
+                <a16:creationId xmlns:a16="http://schemas.microsoft.com/office/drawing/2014/main" id="{EC4F3FAC-B911-056E-3C5E-7AA8D6E746DD}"/>
               </a:ext>
             </a:extLst>
           </p:cNvPr>
@@ -1938,7 +1933,7 @@
           <p:cNvPr id="3" name="Date Placeholder 2">
             <a:extLst>
               <a:ext uri="{FF2B5EF4-FFF2-40B4-BE49-F238E27FC236}">
-                <a16:creationId xmlns:a16="http://schemas.microsoft.com/office/drawing/2014/main" id="{DCE66561-880A-5420-3D9A-0149DDE28ED5}"/>
+                <a16:creationId xmlns:a16="http://schemas.microsoft.com/office/drawing/2014/main" id="{C7EA10F7-8143-A4F0-3F27-3477D4301B64}"/>
               </a:ext>
             </a:extLst>
           </p:cNvPr>
@@ -1954,9 +1949,9 @@
           <a:bodyPr/>
           <a:lstStyle/>
           <a:p>
-            <a:fld id="{913D9D49-D84E-464F-9AB5-825548F45795}" type="datetimeFigureOut">
+            <a:fld id="{75BF6833-93C2-4A38-B7D5-C0F23136646C}" type="datetimeFigureOut">
               <a:rPr lang="en-US" smtClean="0"/>
-              <a:t>7/15/2026</a:t>
+              <a:t>9/18/2026</a:t>
             </a:fld>
             <a:endParaRPr lang="en-US"/>
           </a:p>
@@ -1967,7 +1962,7 @@
           <p:cNvPr id="4" name="Footer Placeholder 3">
             <a:extLst>
               <a:ext uri="{FF2B5EF4-FFF2-40B4-BE49-F238E27FC236}">
-                <a16:creationId xmlns:a16="http://schemas.microsoft.com/office/drawing/2014/main" id="{EFF40B4D-0701-C7CD-F2F7-E86F46232517}"/>
+                <a16:creationId xmlns:a16="http://schemas.microsoft.com/office/drawing/2014/main" id="{D17D5532-E859-B259-8C8D-405E8CFFCDFE}"/>
               </a:ext>
             </a:extLst>
           </p:cNvPr>
@@ -1992,7 +1987,7 @@
           <p:cNvPr id="5" name="Slide Number Placeholder 4">
             <a:extLst>
               <a:ext uri="{FF2B5EF4-FFF2-40B4-BE49-F238E27FC236}">
-                <a16:creationId xmlns:a16="http://schemas.microsoft.com/office/drawing/2014/main" id="{B86CC9D9-6907-1E33-0F4C-1C5383C0E810}"/>
+                <a16:creationId xmlns:a16="http://schemas.microsoft.com/office/drawing/2014/main" id="{7AA1B3E5-0A78-030E-38BC-BF318B207A90}"/>
               </a:ext>
             </a:extLst>
           </p:cNvPr>
@@ -2008,7 +2003,7 @@
           <a:bodyPr/>
           <a:lstStyle/>
           <a:p>
-            <a:fld id="{747D0EAC-CB22-4BB9-BA5A-1A28F4942F91}" type="slidenum">
+            <a:fld id="{536A6638-9696-461F-B0E3-CEDCEACB836C}" type="slidenum">
               <a:rPr lang="en-US" smtClean="0"/>
               <a:t>‹#›</a:t>
             </a:fld>
@@ -2019,7 +2014,7 @@
     </p:spTree>
     <p:extLst>
       <p:ext uri="{BB962C8B-B14F-4D97-AF65-F5344CB8AC3E}">
-        <p14:creationId xmlns:p14="http://schemas.microsoft.com/office/powerpoint/2010/main" val="642919965"/>
+        <p14:creationId xmlns:p14="http://schemas.microsoft.com/office/powerpoint/2010/main" val="1873330768"/>
       </p:ext>
     </p:extLst>
   </p:cSld>
@@ -2051,7 +2046,7 @@
           <p:cNvPr id="2" name="Date Placeholder 1">
             <a:extLst>
               <a:ext uri="{FF2B5EF4-FFF2-40B4-BE49-F238E27FC236}">
-                <a16:creationId xmlns:a16="http://schemas.microsoft.com/office/drawing/2014/main" id="{6D896C16-797F-7A87-2D7A-B4E4D7A0DA8D}"/>
+                <a16:creationId xmlns:a16="http://schemas.microsoft.com/office/drawing/2014/main" id="{BCE0A1F0-1143-AAA6-E554-0BAAC6C880CD}"/>
               </a:ext>
             </a:extLst>
           </p:cNvPr>
@@ -2067,9 +2062,9 @@
           <a:bodyPr/>
           <a:lstStyle/>
           <a:p>
-            <a:fld id="{913D9D49-D84E-464F-9AB5-825548F45795}" type="datetimeFigureOut">
+            <a:fld id="{75BF6833-93C2-4A38-B7D5-C0F23136646C}" type="datetimeFigureOut">
               <a:rPr lang="en-US" smtClean="0"/>
-              <a:t>7/15/2026</a:t>
+              <a:t>9/18/2026</a:t>
             </a:fld>
             <a:endParaRPr lang="en-US"/>
           </a:p>
@@ -2080,7 +2075,7 @@
           <p:cNvPr id="3" name="Footer Placeholder 2">
             <a:extLst>
               <a:ext uri="{FF2B5EF4-FFF2-40B4-BE49-F238E27FC236}">
-                <a16:creationId xmlns:a16="http://schemas.microsoft.com/office/drawing/2014/main" id="{F3E3F1B6-FA18-0361-2F94-6804FE9653ED}"/>
+                <a16:creationId xmlns:a16="http://schemas.microsoft.com/office/drawing/2014/main" id="{D18E6686-0609-C282-1161-D64987B206DB}"/>
               </a:ext>
             </a:extLst>
           </p:cNvPr>
@@ -2105,7 +2100,7 @@
           <p:cNvPr id="4" name="Slide Number Placeholder 3">
             <a:extLst>
               <a:ext uri="{FF2B5EF4-FFF2-40B4-BE49-F238E27FC236}">
-                <a16:creationId xmlns:a16="http://schemas.microsoft.com/office/drawing/2014/main" id="{9F4844CE-47B5-4906-9543-CD7199A0734A}"/>
+                <a16:creationId xmlns:a16="http://schemas.microsoft.com/office/drawing/2014/main" id="{B70390C7-D646-7E93-DC69-4D69877258E7}"/>
               </a:ext>
             </a:extLst>
           </p:cNvPr>
@@ -2121,7 +2116,7 @@
           <a:bodyPr/>
           <a:lstStyle/>
           <a:p>
-            <a:fld id="{747D0EAC-CB22-4BB9-BA5A-1A28F4942F91}" type="slidenum">
+            <a:fld id="{536A6638-9696-461F-B0E3-CEDCEACB836C}" type="slidenum">
               <a:rPr lang="en-US" smtClean="0"/>
               <a:t>‹#›</a:t>
             </a:fld>
@@ -2132,7 +2127,7 @@
     </p:spTree>
     <p:extLst>
       <p:ext uri="{BB962C8B-B14F-4D97-AF65-F5344CB8AC3E}">
-        <p14:creationId xmlns:p14="http://schemas.microsoft.com/office/powerpoint/2010/main" val="2731991455"/>
+        <p14:creationId xmlns:p14="http://schemas.microsoft.com/office/powerpoint/2010/main" val="1405459595"/>
       </p:ext>
     </p:extLst>
   </p:cSld>
@@ -2164,7 +2159,7 @@
           <p:cNvPr id="2" name="Title 1">
             <a:extLst>
               <a:ext uri="{FF2B5EF4-FFF2-40B4-BE49-F238E27FC236}">
-                <a16:creationId xmlns:a16="http://schemas.microsoft.com/office/drawing/2014/main" id="{AE341C81-5F94-2ED3-1314-652505B61476}"/>
+                <a16:creationId xmlns:a16="http://schemas.microsoft.com/office/drawing/2014/main" id="{6F9F930C-1CEC-FB8D-DE55-542631B95E6D}"/>
               </a:ext>
             </a:extLst>
           </p:cNvPr>
@@ -2201,7 +2196,7 @@
           <p:cNvPr id="3" name="Content Placeholder 2">
             <a:extLst>
               <a:ext uri="{FF2B5EF4-FFF2-40B4-BE49-F238E27FC236}">
-                <a16:creationId xmlns:a16="http://schemas.microsoft.com/office/drawing/2014/main" id="{E81EE2FA-B357-0E99-FBBF-C96AA253765B}"/>
+                <a16:creationId xmlns:a16="http://schemas.microsoft.com/office/drawing/2014/main" id="{E81864B8-E43A-AA1A-3743-26B39835BF65}"/>
               </a:ext>
             </a:extLst>
           </p:cNvPr>
@@ -2291,7 +2286,7 @@
           <p:cNvPr id="4" name="Text Placeholder 3">
             <a:extLst>
               <a:ext uri="{FF2B5EF4-FFF2-40B4-BE49-F238E27FC236}">
-                <a16:creationId xmlns:a16="http://schemas.microsoft.com/office/drawing/2014/main" id="{30A06CC4-9383-F8C5-DF20-95B0D977F81C}"/>
+                <a16:creationId xmlns:a16="http://schemas.microsoft.com/office/drawing/2014/main" id="{72323932-612D-FB6E-95FC-6D4170F93A7D}"/>
               </a:ext>
             </a:extLst>
           </p:cNvPr>
@@ -2362,7 +2357,7 @@
           <p:cNvPr id="5" name="Date Placeholder 4">
             <a:extLst>
               <a:ext uri="{FF2B5EF4-FFF2-40B4-BE49-F238E27FC236}">
-                <a16:creationId xmlns:a16="http://schemas.microsoft.com/office/drawing/2014/main" id="{FAE68882-36CA-FA20-26DB-DBBD2ACC2CA9}"/>
+                <a16:creationId xmlns:a16="http://schemas.microsoft.com/office/drawing/2014/main" id="{DD82C827-D68A-FFC4-4550-78AD4FA981DB}"/>
               </a:ext>
             </a:extLst>
           </p:cNvPr>
@@ -2378,9 +2373,9 @@
           <a:bodyPr/>
           <a:lstStyle/>
           <a:p>
-            <a:fld id="{913D9D49-D84E-464F-9AB5-825548F45795}" type="datetimeFigureOut">
+            <a:fld id="{75BF6833-93C2-4A38-B7D5-C0F23136646C}" type="datetimeFigureOut">
               <a:rPr lang="en-US" smtClean="0"/>
-              <a:t>7/15/2026</a:t>
+              <a:t>9/18/2026</a:t>
             </a:fld>
             <a:endParaRPr lang="en-US"/>
           </a:p>
@@ -2391,7 +2386,7 @@
           <p:cNvPr id="6" name="Footer Placeholder 5">
             <a:extLst>
               <a:ext uri="{FF2B5EF4-FFF2-40B4-BE49-F238E27FC236}">
-                <a16:creationId xmlns:a16="http://schemas.microsoft.com/office/drawing/2014/main" id="{86DE3AE7-DFFD-98AD-D762-25AB34BCCC6C}"/>
+                <a16:creationId xmlns:a16="http://schemas.microsoft.com/office/drawing/2014/main" id="{B128B547-A108-1AEE-545C-44F848C86B31}"/>
               </a:ext>
             </a:extLst>
           </p:cNvPr>
@@ -2416,7 +2411,7 @@
           <p:cNvPr id="7" name="Slide Number Placeholder 6">
             <a:extLst>
               <a:ext uri="{FF2B5EF4-FFF2-40B4-BE49-F238E27FC236}">
-                <a16:creationId xmlns:a16="http://schemas.microsoft.com/office/drawing/2014/main" id="{F9833B14-12D7-F0B9-6E57-53FB507A6364}"/>
+                <a16:creationId xmlns:a16="http://schemas.microsoft.com/office/drawing/2014/main" id="{A607DF28-7DA1-DD20-82E1-CBEF84D03B97}"/>
               </a:ext>
             </a:extLst>
           </p:cNvPr>
@@ -2432,7 +2427,7 @@
           <a:bodyPr/>
           <a:lstStyle/>
           <a:p>
-            <a:fld id="{747D0EAC-CB22-4BB9-BA5A-1A28F4942F91}" type="slidenum">
+            <a:fld id="{536A6638-9696-461F-B0E3-CEDCEACB836C}" type="slidenum">
               <a:rPr lang="en-US" smtClean="0"/>
               <a:t>‹#›</a:t>
             </a:fld>
@@ -2443,7 +2438,7 @@
     </p:spTree>
     <p:extLst>
       <p:ext uri="{BB962C8B-B14F-4D97-AF65-F5344CB8AC3E}">
-        <p14:creationId xmlns:p14="http://schemas.microsoft.com/office/powerpoint/2010/main" val="1955513802"/>
+        <p14:creationId xmlns:p14="http://schemas.microsoft.com/office/powerpoint/2010/main" val="4148018740"/>
       </p:ext>
     </p:extLst>
   </p:cSld>
@@ -2475,7 +2470,7 @@
           <p:cNvPr id="2" name="Title 1">
             <a:extLst>
               <a:ext uri="{FF2B5EF4-FFF2-40B4-BE49-F238E27FC236}">
-                <a16:creationId xmlns:a16="http://schemas.microsoft.com/office/drawing/2014/main" id="{3D885A25-D87C-D1D9-2BD0-BCFA4ABEF44A}"/>
+                <a16:creationId xmlns:a16="http://schemas.microsoft.com/office/drawing/2014/main" id="{D532D338-4B5E-B782-6344-9F1A7D1679DC}"/>
               </a:ext>
             </a:extLst>
           </p:cNvPr>
@@ -2512,7 +2507,7 @@
           <p:cNvPr id="3" name="Picture Placeholder 2">
             <a:extLst>
               <a:ext uri="{FF2B5EF4-FFF2-40B4-BE49-F238E27FC236}">
-                <a16:creationId xmlns:a16="http://schemas.microsoft.com/office/drawing/2014/main" id="{3C6C96C5-3AA5-F0F7-5F86-E1A3586851EC}"/>
+                <a16:creationId xmlns:a16="http://schemas.microsoft.com/office/drawing/2014/main" id="{74098D54-A7B9-E220-AF94-E6D82F4ACA9A}"/>
               </a:ext>
             </a:extLst>
           </p:cNvPr>
@@ -2579,7 +2574,7 @@
           <p:cNvPr id="4" name="Text Placeholder 3">
             <a:extLst>
               <a:ext uri="{FF2B5EF4-FFF2-40B4-BE49-F238E27FC236}">
-                <a16:creationId xmlns:a16="http://schemas.microsoft.com/office/drawing/2014/main" id="{BDF0CB97-C032-277A-5C62-633B0DE26807}"/>
+                <a16:creationId xmlns:a16="http://schemas.microsoft.com/office/drawing/2014/main" id="{33FE7CFC-52BE-D875-0248-B2888D566BA3}"/>
               </a:ext>
             </a:extLst>
           </p:cNvPr>
@@ -2650,7 +2645,7 @@
           <p:cNvPr id="5" name="Date Placeholder 4">
             <a:extLst>
               <a:ext uri="{FF2B5EF4-FFF2-40B4-BE49-F238E27FC236}">
-                <a16:creationId xmlns:a16="http://schemas.microsoft.com/office/drawing/2014/main" id="{42BE39F6-157E-3352-A0D2-CEAAF35C6C99}"/>
+                <a16:creationId xmlns:a16="http://schemas.microsoft.com/office/drawing/2014/main" id="{EADC04C6-C383-0A65-6023-B82D077C26B5}"/>
               </a:ext>
             </a:extLst>
           </p:cNvPr>
@@ -2666,9 +2661,9 @@
           <a:bodyPr/>
           <a:lstStyle/>
           <a:p>
-            <a:fld id="{913D9D49-D84E-464F-9AB5-825548F45795}" type="datetimeFigureOut">
+            <a:fld id="{75BF6833-93C2-4A38-B7D5-C0F23136646C}" type="datetimeFigureOut">
               <a:rPr lang="en-US" smtClean="0"/>
-              <a:t>7/15/2026</a:t>
+              <a:t>9/18/2026</a:t>
             </a:fld>
             <a:endParaRPr lang="en-US"/>
           </a:p>
@@ -2679,7 +2674,7 @@
           <p:cNvPr id="6" name="Footer Placeholder 5">
             <a:extLst>
               <a:ext uri="{FF2B5EF4-FFF2-40B4-BE49-F238E27FC236}">
-                <a16:creationId xmlns:a16="http://schemas.microsoft.com/office/drawing/2014/main" id="{471726B2-3886-95C3-B9C8-3F4B5B3BC3C0}"/>
+                <a16:creationId xmlns:a16="http://schemas.microsoft.com/office/drawing/2014/main" id="{A9C6F5EA-B0D2-BC3D-81B0-37447C818C23}"/>
               </a:ext>
             </a:extLst>
           </p:cNvPr>
@@ -2704,7 +2699,7 @@
           <p:cNvPr id="7" name="Slide Number Placeholder 6">
             <a:extLst>
               <a:ext uri="{FF2B5EF4-FFF2-40B4-BE49-F238E27FC236}">
-                <a16:creationId xmlns:a16="http://schemas.microsoft.com/office/drawing/2014/main" id="{A203E8E6-6711-D1E3-C28C-BE604B6B3640}"/>
+                <a16:creationId xmlns:a16="http://schemas.microsoft.com/office/drawing/2014/main" id="{1644CFF4-610A-EEB6-B355-41CADCA5C5FC}"/>
               </a:ext>
             </a:extLst>
           </p:cNvPr>
@@ -2720,7 +2715,7 @@
           <a:bodyPr/>
           <a:lstStyle/>
           <a:p>
-            <a:fld id="{747D0EAC-CB22-4BB9-BA5A-1A28F4942F91}" type="slidenum">
+            <a:fld id="{536A6638-9696-461F-B0E3-CEDCEACB836C}" type="slidenum">
               <a:rPr lang="en-US" smtClean="0"/>
               <a:t>‹#›</a:t>
             </a:fld>
@@ -2731,7 +2726,7 @@
     </p:spTree>
     <p:extLst>
       <p:ext uri="{BB962C8B-B14F-4D97-AF65-F5344CB8AC3E}">
-        <p14:creationId xmlns:p14="http://schemas.microsoft.com/office/powerpoint/2010/main" val="439054266"/>
+        <p14:creationId xmlns:p14="http://schemas.microsoft.com/office/powerpoint/2010/main" val="3627526967"/>
       </p:ext>
     </p:extLst>
   </p:cSld>
@@ -2768,7 +2763,7 @@
           <p:cNvPr id="2" name="Title Placeholder 1">
             <a:extLst>
               <a:ext uri="{FF2B5EF4-FFF2-40B4-BE49-F238E27FC236}">
-                <a16:creationId xmlns:a16="http://schemas.microsoft.com/office/drawing/2014/main" id="{62EAD217-E3EA-8E79-8A4D-9BF1AFA54B06}"/>
+                <a16:creationId xmlns:a16="http://schemas.microsoft.com/office/drawing/2014/main" id="{6DD66073-E86F-19B1-4351-9671A4704729}"/>
               </a:ext>
             </a:extLst>
           </p:cNvPr>
@@ -2806,7 +2801,7 @@
           <p:cNvPr id="3" name="Text Placeholder 2">
             <a:extLst>
               <a:ext uri="{FF2B5EF4-FFF2-40B4-BE49-F238E27FC236}">
-                <a16:creationId xmlns:a16="http://schemas.microsoft.com/office/drawing/2014/main" id="{38865A14-06C9-255F-F969-08292D726E08}"/>
+                <a16:creationId xmlns:a16="http://schemas.microsoft.com/office/drawing/2014/main" id="{E2C6C35B-6A15-005D-4A0D-743C7E83CE3F}"/>
               </a:ext>
             </a:extLst>
           </p:cNvPr>
@@ -2873,7 +2868,7 @@
           <p:cNvPr id="4" name="Date Placeholder 3">
             <a:extLst>
               <a:ext uri="{FF2B5EF4-FFF2-40B4-BE49-F238E27FC236}">
-                <a16:creationId xmlns:a16="http://schemas.microsoft.com/office/drawing/2014/main" id="{36B6B8AE-FD66-61CD-B118-A1D152CEA97A}"/>
+                <a16:creationId xmlns:a16="http://schemas.microsoft.com/office/drawing/2014/main" id="{A145E623-E90F-ADBD-D060-B4F9085D439D}"/>
               </a:ext>
             </a:extLst>
           </p:cNvPr>
@@ -2907,9 +2902,9 @@
             </a:lvl1pPr>
           </a:lstStyle>
           <a:p>
-            <a:fld id="{913D9D49-D84E-464F-9AB5-825548F45795}" type="datetimeFigureOut">
+            <a:fld id="{75BF6833-93C2-4A38-B7D5-C0F23136646C}" type="datetimeFigureOut">
               <a:rPr lang="en-US" smtClean="0"/>
-              <a:t>7/15/2026</a:t>
+              <a:t>9/18/2026</a:t>
             </a:fld>
             <a:endParaRPr lang="en-US"/>
           </a:p>
@@ -2920,7 +2915,7 @@
           <p:cNvPr id="5" name="Footer Placeholder 4">
             <a:extLst>
               <a:ext uri="{FF2B5EF4-FFF2-40B4-BE49-F238E27FC236}">
-                <a16:creationId xmlns:a16="http://schemas.microsoft.com/office/drawing/2014/main" id="{089EA088-C914-C17B-2267-A7746C3949CB}"/>
+                <a16:creationId xmlns:a16="http://schemas.microsoft.com/office/drawing/2014/main" id="{D8425EB6-D120-5D34-2D67-9AA5C15F82C6}"/>
               </a:ext>
             </a:extLst>
           </p:cNvPr>
@@ -2963,7 +2958,7 @@
           <p:cNvPr id="6" name="Slide Number Placeholder 5">
             <a:extLst>
               <a:ext uri="{FF2B5EF4-FFF2-40B4-BE49-F238E27FC236}">
-                <a16:creationId xmlns:a16="http://schemas.microsoft.com/office/drawing/2014/main" id="{421491AB-396C-B726-CEB1-C0AB9F9436DD}"/>
+                <a16:creationId xmlns:a16="http://schemas.microsoft.com/office/drawing/2014/main" id="{45D5C502-9E53-CCAA-540C-939CD7E84486}"/>
               </a:ext>
             </a:extLst>
           </p:cNvPr>
@@ -2997,7 +2992,7 @@
             </a:lvl1pPr>
           </a:lstStyle>
           <a:p>
-            <a:fld id="{747D0EAC-CB22-4BB9-BA5A-1A28F4942F91}" type="slidenum">
+            <a:fld id="{536A6638-9696-461F-B0E3-CEDCEACB836C}" type="slidenum">
               <a:rPr lang="en-US" smtClean="0"/>
               <a:t>‹#›</a:t>
             </a:fld>
@@ -3008,7 +3003,7 @@
     </p:spTree>
     <p:extLst>
       <p:ext uri="{BB962C8B-B14F-4D97-AF65-F5344CB8AC3E}">
-        <p14:creationId xmlns:p14="http://schemas.microsoft.com/office/powerpoint/2010/main" val="566248398"/>
+        <p14:creationId xmlns:p14="http://schemas.microsoft.com/office/powerpoint/2010/main" val="937047972"/>
       </p:ext>
     </p:extLst>
   </p:cSld>
@@ -3331,7 +3326,7 @@
           <p:cNvPr id="2" name="tbl-medium2-accent3">
             <a:extLst>
               <a:ext uri="{FF2B5EF4-FFF2-40B4-BE49-F238E27FC236}">
-                <a16:creationId xmlns:a16="http://schemas.microsoft.com/office/drawing/2014/main" id="{411C9F8F-D3AC-C457-EDFD-912D9FBDEC9C}"/>
+                <a16:creationId xmlns:a16="http://schemas.microsoft.com/office/drawing/2014/main" id="{6E7AB134-A4E7-9081-100E-9B0A2186B807}"/>
               </a:ext>
             </a:extLst>
           </p:cNvPr>
@@ -3341,7 +3336,7 @@
           <p:nvPr>
             <p:extLst>
               <p:ext uri="{D42A27DB-BD31-4B8C-83A1-F6EECF244321}">
-                <p14:modId xmlns:p14="http://schemas.microsoft.com/office/powerpoint/2010/main" val="1848318480"/>
+                <p14:modId xmlns:p14="http://schemas.microsoft.com/office/powerpoint/2010/main" val="442991362"/>
               </p:ext>
             </p:extLst>
           </p:nvPr>
@@ -3360,21 +3355,21 @@
                 <a:gridCol w="2032000">
                   <a:extLst>
                     <a:ext uri="{9D8B030D-6E8A-4147-A177-3AD203B41FA5}">
-                      <a16:colId xmlns:a16="http://schemas.microsoft.com/office/drawing/2014/main" val="947183530"/>
+                      <a16:colId xmlns:a16="http://schemas.microsoft.com/office/drawing/2014/main" val="3870286437"/>
                     </a:ext>
                   </a:extLst>
                 </a:gridCol>
                 <a:gridCol w="2032000">
                   <a:extLst>
                     <a:ext uri="{9D8B030D-6E8A-4147-A177-3AD203B41FA5}">
-                      <a16:colId xmlns:a16="http://schemas.microsoft.com/office/drawing/2014/main" val="4111011301"/>
+                      <a16:colId xmlns:a16="http://schemas.microsoft.com/office/drawing/2014/main" val="1606458160"/>
                     </a:ext>
                   </a:extLst>
                 </a:gridCol>
                 <a:gridCol w="2032000">
                   <a:extLst>
                     <a:ext uri="{9D8B030D-6E8A-4147-A177-3AD203B41FA5}">
-                      <a16:colId xmlns:a16="http://schemas.microsoft.com/office/drawing/2014/main" val="3400265842"/>
+                      <a16:colId xmlns:a16="http://schemas.microsoft.com/office/drawing/2014/main" val="17322977"/>
                     </a:ext>
                   </a:extLst>
                 </a:gridCol>
@@ -3386,10 +3381,10 @@
                     <a:lstStyle/>
                     <a:p>
                       <a:r>
-                        <a:rPr lang="sv-SE" dirty="0"/>
+                        <a:rPr lang="sv-SE"/>
                         <a:t>Medium Style 2 - Accent 3</a:t>
                       </a:r>
-                      <a:endParaRPr lang="en-US" dirty="0"/>
+                      <a:endParaRPr lang="en-US"/>
                     </a:p>
                   </a:txBody>
                   <a:tcPr/>
@@ -3416,7 +3411,7 @@
                 </a:tc>
                 <a:extLst>
                   <a:ext uri="{0D108BD9-81ED-4DB2-BD59-A6C34878D82A}">
-                    <a16:rowId xmlns:a16="http://schemas.microsoft.com/office/drawing/2014/main" val="1942820050"/>
+                    <a16:rowId xmlns:a16="http://schemas.microsoft.com/office/drawing/2014/main" val="1168168013"/>
                   </a:ext>
                 </a:extLst>
               </a:tr>
@@ -3439,7 +3434,7 @@
                     <a:bodyPr/>
                     <a:lstStyle/>
                     <a:p>
-                      <a:endParaRPr lang="en-US" dirty="0"/>
+                      <a:endParaRPr lang="en-US"/>
                     </a:p>
                   </a:txBody>
                   <a:tcPr/>
@@ -3456,7 +3451,7 @@
                 </a:tc>
                 <a:extLst>
                   <a:ext uri="{0D108BD9-81ED-4DB2-BD59-A6C34878D82A}">
-                    <a16:rowId xmlns:a16="http://schemas.microsoft.com/office/drawing/2014/main" val="1091908217"/>
+                    <a16:rowId xmlns:a16="http://schemas.microsoft.com/office/drawing/2014/main" val="972438635"/>
                   </a:ext>
                 </a:extLst>
               </a:tr>
@@ -3486,14 +3481,14 @@
                     <a:bodyPr/>
                     <a:lstStyle/>
                     <a:p>
-                      <a:endParaRPr lang="en-US" dirty="0"/>
+                      <a:endParaRPr lang="en-US"/>
                     </a:p>
                   </a:txBody>
                   <a:tcPr/>
                 </a:tc>
                 <a:extLst>
                   <a:ext uri="{0D108BD9-81ED-4DB2-BD59-A6C34878D82A}">
-                    <a16:rowId xmlns:a16="http://schemas.microsoft.com/office/drawing/2014/main" val="3544918026"/>
+                    <a16:rowId xmlns:a16="http://schemas.microsoft.com/office/drawing/2014/main" val="64500472"/>
                   </a:ext>
                 </a:extLst>
               </a:tr>
@@ -3506,7 +3501,7 @@
           <p:cNvPr id="3" name="tbl-medium4-accent4">
             <a:extLst>
               <a:ext uri="{FF2B5EF4-FFF2-40B4-BE49-F238E27FC236}">
-                <a16:creationId xmlns:a16="http://schemas.microsoft.com/office/drawing/2014/main" id="{132062E8-0FDE-3396-BCF9-2E803A24D584}"/>
+                <a16:creationId xmlns:a16="http://schemas.microsoft.com/office/drawing/2014/main" id="{BFFDDC04-C62B-93EB-6B3F-6CDE13397D78}"/>
               </a:ext>
             </a:extLst>
           </p:cNvPr>
@@ -3516,7 +3511,7 @@
           <p:nvPr>
             <p:extLst>
               <p:ext uri="{D42A27DB-BD31-4B8C-83A1-F6EECF244321}">
-                <p14:modId xmlns:p14="http://schemas.microsoft.com/office/powerpoint/2010/main" val="2686672047"/>
+                <p14:modId xmlns:p14="http://schemas.microsoft.com/office/powerpoint/2010/main" val="215344268"/>
               </p:ext>
             </p:extLst>
           </p:nvPr>
@@ -3535,21 +3530,21 @@
                 <a:gridCol w="2032000">
                   <a:extLst>
                     <a:ext uri="{9D8B030D-6E8A-4147-A177-3AD203B41FA5}">
-                      <a16:colId xmlns:a16="http://schemas.microsoft.com/office/drawing/2014/main" val="3655388146"/>
+                      <a16:colId xmlns:a16="http://schemas.microsoft.com/office/drawing/2014/main" val="2754958769"/>
                     </a:ext>
                   </a:extLst>
                 </a:gridCol>
                 <a:gridCol w="2032000">
                   <a:extLst>
                     <a:ext uri="{9D8B030D-6E8A-4147-A177-3AD203B41FA5}">
-                      <a16:colId xmlns:a16="http://schemas.microsoft.com/office/drawing/2014/main" val="1297348179"/>
+                      <a16:colId xmlns:a16="http://schemas.microsoft.com/office/drawing/2014/main" val="4076299893"/>
                     </a:ext>
                   </a:extLst>
                 </a:gridCol>
                 <a:gridCol w="2032000">
                   <a:extLst>
                     <a:ext uri="{9D8B030D-6E8A-4147-A177-3AD203B41FA5}">
-                      <a16:colId xmlns:a16="http://schemas.microsoft.com/office/drawing/2014/main" val="3449757824"/>
+                      <a16:colId xmlns:a16="http://schemas.microsoft.com/office/drawing/2014/main" val="3879596006"/>
                     </a:ext>
                   </a:extLst>
                 </a:gridCol>
@@ -3591,7 +3586,7 @@
                 </a:tc>
                 <a:extLst>
                   <a:ext uri="{0D108BD9-81ED-4DB2-BD59-A6C34878D82A}">
-                    <a16:rowId xmlns:a16="http://schemas.microsoft.com/office/drawing/2014/main" val="3204453536"/>
+                    <a16:rowId xmlns:a16="http://schemas.microsoft.com/office/drawing/2014/main" val="2209210913"/>
                   </a:ext>
                 </a:extLst>
               </a:tr>
@@ -3631,7 +3626,7 @@
                 </a:tc>
                 <a:extLst>
                   <a:ext uri="{0D108BD9-81ED-4DB2-BD59-A6C34878D82A}">
-                    <a16:rowId xmlns:a16="http://schemas.microsoft.com/office/drawing/2014/main" val="2032147205"/>
+                    <a16:rowId xmlns:a16="http://schemas.microsoft.com/office/drawing/2014/main" val="2174854880"/>
                   </a:ext>
                 </a:extLst>
               </a:tr>
@@ -3668,7 +3663,7 @@
                 </a:tc>
                 <a:extLst>
                   <a:ext uri="{0D108BD9-81ED-4DB2-BD59-A6C34878D82A}">
-                    <a16:rowId xmlns:a16="http://schemas.microsoft.com/office/drawing/2014/main" val="2865565511"/>
+                    <a16:rowId xmlns:a16="http://schemas.microsoft.com/office/drawing/2014/main" val="443932190"/>
                   </a:ext>
                 </a:extLst>
               </a:tr>
@@ -3681,7 +3676,7 @@
           <p:cNvPr id="4" name="tbl-light2-accent1">
             <a:extLst>
               <a:ext uri="{FF2B5EF4-FFF2-40B4-BE49-F238E27FC236}">
-                <a16:creationId xmlns:a16="http://schemas.microsoft.com/office/drawing/2014/main" id="{4D31540C-2195-230E-807E-A68EFD8BD0E2}"/>
+                <a16:creationId xmlns:a16="http://schemas.microsoft.com/office/drawing/2014/main" id="{A00D9A56-BBC5-A9BE-D540-630FC53E2D9D}"/>
               </a:ext>
             </a:extLst>
           </p:cNvPr>
@@ -3691,7 +3686,7 @@
           <p:nvPr>
             <p:extLst>
               <p:ext uri="{D42A27DB-BD31-4B8C-83A1-F6EECF244321}">
-                <p14:modId xmlns:p14="http://schemas.microsoft.com/office/powerpoint/2010/main" val="2785196755"/>
+                <p14:modId xmlns:p14="http://schemas.microsoft.com/office/powerpoint/2010/main" val="281289958"/>
               </p:ext>
             </p:extLst>
           </p:nvPr>
@@ -3710,21 +3705,21 @@
                 <a:gridCol w="2032000">
                   <a:extLst>
                     <a:ext uri="{9D8B030D-6E8A-4147-A177-3AD203B41FA5}">
-                      <a16:colId xmlns:a16="http://schemas.microsoft.com/office/drawing/2014/main" val="1954571927"/>
+                      <a16:colId xmlns:a16="http://schemas.microsoft.com/office/drawing/2014/main" val="211697094"/>
                     </a:ext>
                   </a:extLst>
                 </a:gridCol>
                 <a:gridCol w="2032000">
                   <a:extLst>
                     <a:ext uri="{9D8B030D-6E8A-4147-A177-3AD203B41FA5}">
-                      <a16:colId xmlns:a16="http://schemas.microsoft.com/office/drawing/2014/main" val="1055650005"/>
+                      <a16:colId xmlns:a16="http://schemas.microsoft.com/office/drawing/2014/main" val="3200985117"/>
                     </a:ext>
                   </a:extLst>
                 </a:gridCol>
                 <a:gridCol w="2032000">
                   <a:extLst>
                     <a:ext uri="{9D8B030D-6E8A-4147-A177-3AD203B41FA5}">
-                      <a16:colId xmlns:a16="http://schemas.microsoft.com/office/drawing/2014/main" val="1525846205"/>
+                      <a16:colId xmlns:a16="http://schemas.microsoft.com/office/drawing/2014/main" val="2687858486"/>
                     </a:ext>
                   </a:extLst>
                 </a:gridCol>
@@ -3765,7 +3760,7 @@
                 </a:tc>
                 <a:extLst>
                   <a:ext uri="{0D108BD9-81ED-4DB2-BD59-A6C34878D82A}">
-                    <a16:rowId xmlns:a16="http://schemas.microsoft.com/office/drawing/2014/main" val="3470030834"/>
+                    <a16:rowId xmlns:a16="http://schemas.microsoft.com/office/drawing/2014/main" val="2020468719"/>
                   </a:ext>
                 </a:extLst>
               </a:tr>
@@ -3805,7 +3800,7 @@
                 </a:tc>
                 <a:extLst>
                   <a:ext uri="{0D108BD9-81ED-4DB2-BD59-A6C34878D82A}">
-                    <a16:rowId xmlns:a16="http://schemas.microsoft.com/office/drawing/2014/main" val="2661293941"/>
+                    <a16:rowId xmlns:a16="http://schemas.microsoft.com/office/drawing/2014/main" val="2334346629"/>
                   </a:ext>
                 </a:extLst>
               </a:tr>
@@ -3842,7 +3837,262 @@
                 </a:tc>
                 <a:extLst>
                   <a:ext uri="{0D108BD9-81ED-4DB2-BD59-A6C34878D82A}">
-                    <a16:rowId xmlns:a16="http://schemas.microsoft.com/office/drawing/2014/main" val="1007238532"/>
+                    <a16:rowId xmlns:a16="http://schemas.microsoft.com/office/drawing/2014/main" val="684391893"/>
+                  </a:ext>
+                </a:extLst>
+              </a:tr>
+            </a:tbl>
+          </a:graphicData>
+        </a:graphic>
+      </p:graphicFrame>
+      <p:graphicFrame>
+        <p:nvGraphicFramePr>
+          <p:cNvPr id="5" name="tbl-all-look-flags">
+            <a:extLst>
+              <a:ext uri="{FF2B5EF4-FFF2-40B4-BE49-F238E27FC236}">
+                <a16:creationId xmlns:a16="http://schemas.microsoft.com/office/drawing/2014/main" id="{077F805C-975D-2EC6-065B-AC46C807CE1B}"/>
+              </a:ext>
+            </a:extLst>
+          </p:cNvPr>
+          <p:cNvGraphicFramePr>
+            <a:graphicFrameLocks noGrp="1"/>
+          </p:cNvGraphicFramePr>
+          <p:nvPr>
+            <p:extLst>
+              <p:ext uri="{D42A27DB-BD31-4B8C-83A1-F6EECF244321}">
+                <p14:modId xmlns:p14="http://schemas.microsoft.com/office/powerpoint/2010/main" val="1977330967"/>
+              </p:ext>
+            </p:extLst>
+          </p:nvPr>
+        </p:nvGraphicFramePr>
+        <p:xfrm>
+          <a:off x="762000" y="6223000"/>
+          <a:ext cx="6096000" cy="1973580"/>
+        </p:xfrm>
+        <a:graphic>
+          <a:graphicData uri="http://schemas.openxmlformats.org/drawingml/2006/table">
+            <a:tbl>
+              <a:tblPr firstRow="1" firstCol="1" lastRow="1" lastCol="1" bandRow="1" bandCol="1">
+                <a:tableStyleId>{F5AB1C69-6EDB-4FF4-983F-18BD219EF322}</a:tableStyleId>
+              </a:tblPr>
+              <a:tblGrid>
+                <a:gridCol w="1524000">
+                  <a:extLst>
+                    <a:ext uri="{9D8B030D-6E8A-4147-A177-3AD203B41FA5}">
+                      <a16:colId xmlns:a16="http://schemas.microsoft.com/office/drawing/2014/main" val="4255149791"/>
+                    </a:ext>
+                  </a:extLst>
+                </a:gridCol>
+                <a:gridCol w="1524000">
+                  <a:extLst>
+                    <a:ext uri="{9D8B030D-6E8A-4147-A177-3AD203B41FA5}">
+                      <a16:colId xmlns:a16="http://schemas.microsoft.com/office/drawing/2014/main" val="109274724"/>
+                    </a:ext>
+                  </a:extLst>
+                </a:gridCol>
+                <a:gridCol w="1524000">
+                  <a:extLst>
+                    <a:ext uri="{9D8B030D-6E8A-4147-A177-3AD203B41FA5}">
+                      <a16:colId xmlns:a16="http://schemas.microsoft.com/office/drawing/2014/main" val="1032435908"/>
+                    </a:ext>
+                  </a:extLst>
+                </a:gridCol>
+                <a:gridCol w="1524000">
+                  <a:extLst>
+                    <a:ext uri="{9D8B030D-6E8A-4147-A177-3AD203B41FA5}">
+                      <a16:colId xmlns:a16="http://schemas.microsoft.com/office/drawing/2014/main" val="3814344770"/>
+                    </a:ext>
+                  </a:extLst>
+                </a:gridCol>
+              </a:tblGrid>
+              <a:tr h="444500">
+                <a:tc>
+                  <a:txBody>
+                    <a:bodyPr/>
+                    <a:lstStyle/>
+                    <a:p>
+                      <a:r>
+                        <a:rPr lang="en-US"/>
+                        <a:t>all six regions</a:t>
+                      </a:r>
+                    </a:p>
+                  </a:txBody>
+                  <a:tcPr/>
+                </a:tc>
+                <a:tc>
+                  <a:txBody>
+                    <a:bodyPr/>
+                    <a:lstStyle/>
+                    <a:p>
+                      <a:endParaRPr lang="en-US"/>
+                    </a:p>
+                  </a:txBody>
+                  <a:tcPr/>
+                </a:tc>
+                <a:tc>
+                  <a:txBody>
+                    <a:bodyPr/>
+                    <a:lstStyle/>
+                    <a:p>
+                      <a:endParaRPr lang="en-US"/>
+                    </a:p>
+                  </a:txBody>
+                  <a:tcPr/>
+                </a:tc>
+                <a:tc>
+                  <a:txBody>
+                    <a:bodyPr/>
+                    <a:lstStyle/>
+                    <a:p>
+                      <a:endParaRPr lang="en-US"/>
+                    </a:p>
+                  </a:txBody>
+                  <a:tcPr/>
+                </a:tc>
+                <a:extLst>
+                  <a:ext uri="{0D108BD9-81ED-4DB2-BD59-A6C34878D82A}">
+                    <a16:rowId xmlns:a16="http://schemas.microsoft.com/office/drawing/2014/main" val="1663383349"/>
+                  </a:ext>
+                </a:extLst>
+              </a:tr>
+              <a:tr h="444500">
+                <a:tc>
+                  <a:txBody>
+                    <a:bodyPr/>
+                    <a:lstStyle/>
+                    <a:p>
+                      <a:endParaRPr lang="en-US"/>
+                    </a:p>
+                  </a:txBody>
+                  <a:tcPr/>
+                </a:tc>
+                <a:tc>
+                  <a:txBody>
+                    <a:bodyPr/>
+                    <a:lstStyle/>
+                    <a:p>
+                      <a:endParaRPr lang="en-US"/>
+                    </a:p>
+                  </a:txBody>
+                  <a:tcPr/>
+                </a:tc>
+                <a:tc>
+                  <a:txBody>
+                    <a:bodyPr/>
+                    <a:lstStyle/>
+                    <a:p>
+                      <a:endParaRPr lang="en-US"/>
+                    </a:p>
+                  </a:txBody>
+                  <a:tcPr/>
+                </a:tc>
+                <a:tc>
+                  <a:txBody>
+                    <a:bodyPr/>
+                    <a:lstStyle/>
+                    <a:p>
+                      <a:endParaRPr lang="en-US"/>
+                    </a:p>
+                  </a:txBody>
+                  <a:tcPr/>
+                </a:tc>
+                <a:extLst>
+                  <a:ext uri="{0D108BD9-81ED-4DB2-BD59-A6C34878D82A}">
+                    <a16:rowId xmlns:a16="http://schemas.microsoft.com/office/drawing/2014/main" val="3932858560"/>
+                  </a:ext>
+                </a:extLst>
+              </a:tr>
+              <a:tr h="444500">
+                <a:tc>
+                  <a:txBody>
+                    <a:bodyPr/>
+                    <a:lstStyle/>
+                    <a:p>
+                      <a:endParaRPr lang="en-US"/>
+                    </a:p>
+                  </a:txBody>
+                  <a:tcPr/>
+                </a:tc>
+                <a:tc>
+                  <a:txBody>
+                    <a:bodyPr/>
+                    <a:lstStyle/>
+                    <a:p>
+                      <a:endParaRPr lang="en-US"/>
+                    </a:p>
+                  </a:txBody>
+                  <a:tcPr/>
+                </a:tc>
+                <a:tc>
+                  <a:txBody>
+                    <a:bodyPr/>
+                    <a:lstStyle/>
+                    <a:p>
+                      <a:endParaRPr lang="en-US"/>
+                    </a:p>
+                  </a:txBody>
+                  <a:tcPr/>
+                </a:tc>
+                <a:tc>
+                  <a:txBody>
+                    <a:bodyPr/>
+                    <a:lstStyle/>
+                    <a:p>
+                      <a:endParaRPr lang="en-US"/>
+                    </a:p>
+                  </a:txBody>
+                  <a:tcPr/>
+                </a:tc>
+                <a:extLst>
+                  <a:ext uri="{0D108BD9-81ED-4DB2-BD59-A6C34878D82A}">
+                    <a16:rowId xmlns:a16="http://schemas.microsoft.com/office/drawing/2014/main" val="2417910233"/>
+                  </a:ext>
+                </a:extLst>
+              </a:tr>
+              <a:tr h="444500">
+                <a:tc>
+                  <a:txBody>
+                    <a:bodyPr/>
+                    <a:lstStyle/>
+                    <a:p>
+                      <a:endParaRPr lang="en-US"/>
+                    </a:p>
+                  </a:txBody>
+                  <a:tcPr/>
+                </a:tc>
+                <a:tc>
+                  <a:txBody>
+                    <a:bodyPr/>
+                    <a:lstStyle/>
+                    <a:p>
+                      <a:endParaRPr lang="en-US"/>
+                    </a:p>
+                  </a:txBody>
+                  <a:tcPr/>
+                </a:tc>
+                <a:tc>
+                  <a:txBody>
+                    <a:bodyPr/>
+                    <a:lstStyle/>
+                    <a:p>
+                      <a:endParaRPr lang="en-US"/>
+                    </a:p>
+                  </a:txBody>
+                  <a:tcPr/>
+                </a:tc>
+                <a:tc>
+                  <a:txBody>
+                    <a:bodyPr/>
+                    <a:lstStyle/>
+                    <a:p>
+                      <a:endParaRPr lang="en-US"/>
+                    </a:p>
+                  </a:txBody>
+                  <a:tcPr/>
+                </a:tc>
+                <a:extLst>
+                  <a:ext uri="{0D108BD9-81ED-4DB2-BD59-A6C34878D82A}">
+                    <a16:rowId xmlns:a16="http://schemas.microsoft.com/office/drawing/2014/main" val="1570205171"/>
                   </a:ext>
                 </a:extLst>
               </a:tr>
@@ -3853,7 +4103,7 @@
     </p:spTree>
     <p:extLst>
       <p:ext uri="{BB962C8B-B14F-4D97-AF65-F5344CB8AC3E}">
-        <p14:creationId xmlns:p14="http://schemas.microsoft.com/office/powerpoint/2010/main" val="571068459"/>
+        <p14:creationId xmlns:p14="http://schemas.microsoft.com/office/powerpoint/2010/main" val="1428149830"/>
       </p:ext>
     </p:extLst>
   </p:cSld>
